--- a/Della_Social_Media_Strategy.pptx
+++ b/Della_Social_Media_Strategy.pptx
@@ -511,7 +511,7 @@
           <a:p>
             <a:r>
               <a:rPr lang="en-US" dirty="0"/>
-              <a:t>Open with the one-line promise: I will make every township story visible, credible and easy to enquire about. This is a portfolio of how I would plan, create, run and measure Della's social media. Della Townships is the focus. The plan also uses Della Resorts and the adventure park in Lonavala as the living proof that Della already runs great places. Say one real result from your past roles in your own words; do not read the slide.</a:t>
+              <a:t/>
             </a:r>
             <a:endParaRPr lang="en-US" dirty="0"/>
           </a:p>
@@ -599,7 +599,7 @@
           <a:p>
             <a:r>
               <a:rPr lang="en-US" dirty="0"/>
-              <a:t>Thirty days, week by week: audit of platform performance, set the system, launch the rhythm, then the first report. The deliverables are things Della can open and review. Days 31 to 90: launch the three campaigns, test hooks, formats and cities, then scale what works. Close with the last line: ORM, social listening, analytics and execution in one person means Della Townships can grow reach and see what that reach earns. Then point to the interactive portfolio link.</a:t>
+              <a:t/>
             </a:r>
             <a:endParaRPr lang="en-US" dirty="0"/>
           </a:p>
@@ -687,7 +687,7 @@
           <a:p>
             <a:r>
               <a:rPr lang="en-US" dirty="0"/>
-              <a:t>This is me in one slide: six-plus years in social operations, ORM, analytics and customer engagement. The gold strip is my own track record: a 22 percent engagement uplift and a reporting workflow cut from three or four hours to thirty or forty minutes. Be ready to explain how each was measured. The right side is concrete: what I can hand Della in the first month, not just what I know. Photography and video are part of the toolset, not outsourced by default.</a:t>
+              <a:t/>
             </a:r>
             <a:endParaRPr lang="en-US" dirty="0"/>
           </a:p>
@@ -775,7 +775,7 @@
           <a:p>
             <a:r>
               <a:rPr lang="en-US" dirty="0"/>
-              <a:t>Six jobs I can take off the team's plate, from strategy to reporting. Each has a real output Della can see, so this is a list of deliverables, not a list of adjectives. The point to land: one person who can plan it, make it, publish it, look after the community and report on it, while coordinating creators, sales and leadership.</a:t>
+              <a:t/>
             </a:r>
             <a:endParaRPr lang="en-US" dirty="0"/>
           </a:p>
@@ -863,7 +863,7 @@
           <a:p>
             <a:r>
               <a:rPr lang="en-US" dirty="0"/>
-              <a:t>Della is a premium, design-led brand, so the quality of the image and the edit matters. I shoot, edit and brief creators myself, which keeps cost and turnaround under control. Each capability connects to a business job: photography builds trust, video earns reach, planning keeps the feed consistent, briefs align people and execution turns ideas into delivery. If asked for samples, share work you have permission to show; none is embedded here.</a:t>
+              <a:t/>
             </a:r>
             <a:endParaRPr lang="en-US" dirty="0"/>
           </a:p>
@@ -951,7 +951,7 @@
           <a:p>
             <a:r>
               <a:rPr lang="en-US" dirty="0"/>
-              <a:t>Kept short on purpose, because Della knows its own business. This is from public pages: 13 townships being launched across 11 cities and 9 more upcoming, the asset-light model, and Lonavala with 168 rooms and villas and an adventure park of 50 plus activities. I cannot see follower counts or engagement from outside, so the observations are hypotheses, not findings. Week one is an audit to confirm or change them.</a:t>
+              <a:t/>
             </a:r>
             <a:endParaRPr lang="en-US" dirty="0"/>
           </a:p>
@@ -1039,7 +1039,7 @@
           <a:p>
             <a:r>
               <a:rPr lang="en-US" dirty="0"/>
-              <a:t>Each channel has one job tied to a business goal. Instagram creates desire and awareness. Facebook reaches city communities and turns questions into enquiries. LinkedIn serves landowner partners, investors and corporates. YouTube builds depth and trust with walk-throughs and explainers. Underneath sits one five-stage funnel: Attract, Engage, Enquire, Visit and Decide. A township is a considered purchase, so Visit matters: a site or sales gallery visit for buyers, a Lonavala visit for partners and a stay or ticket for guests. Full plan: Townships, for home buyers, investors and nris: Attract: Get the township themes noticed in the right cities. Engage: Answer what buyers ask before they call. Enquire: Make the first step easy and trackable. Visit: Turn interest into a site or sales gallery visit. Decide: Support sales to close, and let owners speak. Landowner partners, for landowners and developers: Attract: Reach landowners and developers who could partner. Engage: Show how the asset-light model works. Enquire: Make a partner conversation easy to start. Visit: Let partners see a working Della place. Decide: Help the business team move to a signed partnership. Resorts and Adventure, for weekend guests, families, corporates: Attract: Keep Della Lonavala top of mind in Mumbai and Pune. Engage: Help people plan the weekend. Enquire: Make booking a short step. Visit: Fill the stay and the park. Decide: Bring guests back and win referrals.</a:t>
+              <a:t/>
             </a:r>
             <a:endParaRPr lang="en-US" dirty="0"/>
           </a:p>
@@ -1127,7 +1127,7 @@
           <a:p>
             <a:r>
               <a:rPr lang="en-US" dirty="0"/>
-              <a:t>Three concepts, each tied to a business objective and a measure. Live the Racecourse on Instagram Reel. Objective: Awareness to qualified site visits. Idea: A film series on polo-lifestyle living at Darumbre, from the lawn to the home, ending in a clear private-visit invitation. Sample caption: Imagine a weekend that starts on a polo lawn. Della Racecourse, Pune. Book a private site visit, link in bio. Measured by: 3-second hold, saves, enquiry clicks. Your city, your township on Facebook and Instagram. Objective: Qualified enquiries from each launch city. Idea: A city-by-city launch series: theme film, design preview and a Q&amp;A with the sales team, run in local Facebook communities and Instagram with a one-tap WhatsApp enquiry. Sample caption: Something new is coming to your city. See the theme, the design and the first look, then ask us anything. Measured by: Qualified enquiries per city, response time, questions answered. Stay the Della way on Instagram carousel and Facebook. Objective: Bookings, tickets and township visits, plus reputation. Idea: Weekend plans from Lonavala, with an invitation to see how Della runs a place before it builds one. Sample caption: One weekend, one place: 168 rooms and villas and 50+ adventure activities in Lonavala. Plan yours. Measured by: Link clicks, bookings from social, guest content, review sentiment. Captions are samples. Nothing here claims a past result.</a:t>
+              <a:t/>
             </a:r>
             <a:endParaRPr lang="en-US" dirty="0"/>
           </a:p>
@@ -1215,7 +1215,7 @@
           <a:p>
             <a:r>
               <a:rPr lang="en-US" dirty="0"/>
-              <a:t>Community is where a premium brand is won or lost. The workflow is Listen, Triage, Reply, Escalate, Learn. Level 1 is answered from a playbook, Level 2 such as price or availability moves to WhatsApp or a call and goes to sales with context, and Level 3 such as complaints, safety, legal or media goes straight to leadership. Listening themes feed content and service fixes: price and payment, location and connectivity, delivery timelines, amenities, trust and approvals, and the stay experience. Response-time targets are proposed and set from the performance audit.</a:t>
+              <a:t/>
             </a:r>
             <a:endParaRPr lang="en-US" dirty="0"/>
           </a:p>
@@ -1303,7 +1303,7 @@
           <a:p>
             <a:r>
               <a:rPr lang="en-US" dirty="0"/>
-              <a:t>These six metrics are what I would put in front of leadership every month, each answering one question they care about. Targets are set from the week-one performance audit, once I can see how each channel performs today. Three levels of KPI: visibility, consideration, and demand and trust. Each business has a north-star number: completed site visits for Townships, qualified partner enquiries for landowner partners, and bookings and tickets from social for Resorts and Adventure. Optimisation loop: Measure weekly, Learn why, Test one change at a time, then Scale the winners. Weekly pulse, Every Monday: Top content, audience response, enquiries, new questions and issues to fix. Monthly insights, First week: Funnel by business and channel, pillar and format winners, sentiment and three actions. Quarterly reset, Every quarter: What to do more, less and next, against targets set from the performance audit.</a:t>
+              <a:t/>
             </a:r>
             <a:endParaRPr lang="en-US" dirty="0"/>
           </a:p>
@@ -3125,51 +3125,6 @@
       </p:sp>
       <p:sp>
         <p:nvSpPr>
-          <p:cNvPr id="29" name="Text 27">
-            <a:hlinkClick r:id="rId1" tooltip=""/>
-          </p:cNvPr>
-          <p:cNvSpPr txBox="1"/>
-          <p:nvPr/>
-        </p:nvSpPr>
-        <p:spPr>
-          <a:xfrm>
-            <a:off x="7772400" y="5852160"/>
-            <a:ext cx="3611880" cy="365760"/>
-          </a:xfrm>
-          <a:prstGeom prst="rect">
-            <a:avLst/>
-          </a:prstGeom>
-          <a:noFill/>
-          <a:ln/>
-        </p:spPr>
-        <p:txBody>
-          <a:bodyPr wrap="square" lIns="0" tIns="0" rIns="0" bIns="0" rtlCol="0" anchor="ctr"/>
-          <a:lstStyle/>
-          <a:p>
-            <a:pPr algn="r" indent="0" marL="0">
-              <a:buNone/>
-            </a:pPr>
-            <a:r>
-              <a:rPr lang="en-US" sz="1200" b="1" u="sng" dirty="0">
-                <a:solidFill>
-                  <a:schemeClr val="tx1"/>
-                </a:solidFill>
-                <a:hlinkClick r:id="rId1" invalidUrl="" action="" tgtFrame="" tooltip="" history="1" highlightClick="0" endSnd="0">
-                  <a:extLst>
-                    <a:ext uri="{A12FA001-AC4F-418D-AE19-62706E023703}">
-                      <ahyp:hlinkClr xmlns:ahyp="http://schemas.microsoft.com/office/drawing/2018/hyperlinkcolor" val="tx"/>
-                    </a:ext>
-                  </a:extLst>
-                </a:hlinkClick>
-              </a:rPr>
-              <a:t>Portfolio: bharatbassi.github.io/dellagroupSM</a:t>
-            </a:r>
-            <a:endParaRPr lang="en-US" sz="1200" dirty="0"/>
-          </a:p>
-        </p:txBody>
-      </p:sp>
-      <p:sp>
-        <p:nvSpPr>
           <p:cNvPr id="25" name="Slide Number Placeholder 0"/>
           <p:cNvSpPr>
             <a:spLocks noGrp="1"/>
@@ -6916,42 +6871,6 @@
       </p:sp>
       <p:sp>
         <p:nvSpPr>
-          <p:cNvPr id="17" name="Text 15"/>
-          <p:cNvSpPr txBox="1"/>
-          <p:nvPr/>
-        </p:nvSpPr>
-        <p:spPr>
-          <a:xfrm>
-            <a:off x="548640" y="5943600"/>
-            <a:ext cx="11091672" cy="365760"/>
-          </a:xfrm>
-          <a:prstGeom prst="rect">
-            <a:avLst/>
-          </a:prstGeom>
-          <a:noFill/>
-          <a:ln/>
-        </p:spPr>
-        <p:txBody>
-          <a:bodyPr wrap="square" lIns="0" tIns="0" rIns="0" bIns="0" rtlCol="0" anchor="ctr"/>
-          <a:lstStyle/>
-          <a:p>
-            <a:pPr indent="0" marL="0">
-              <a:buNone/>
-            </a:pPr>
-            <a:r>
-              <a:rPr lang="en-US" sz="1200" i="1" dirty="0">
-                <a:solidFill>
-                  <a:schemeClr val="accent3"/>
-                </a:solidFill>
-              </a:rPr>
-              <a:t>Public information only. Follower and engagement data is not visible from outside, so week one starts with an audit.</a:t>
-            </a:r>
-            <a:endParaRPr lang="en-US" sz="1200" dirty="0"/>
-          </a:p>
-        </p:txBody>
-      </p:sp>
-      <p:sp>
-        <p:nvSpPr>
           <p:cNvPr id="25" name="Slide Number Placeholder 0"/>
           <p:cNvSpPr>
             <a:spLocks noGrp="1"/>
@@ -9603,14 +9522,39 @@
       </p:sp>
       <p:sp>
         <p:nvSpPr>
-          <p:cNvPr id="7" name="Text 5"/>
-          <p:cNvSpPr txBox="1"/>
-          <p:nvPr/>
-        </p:nvSpPr>
-        <p:spPr>
-          <a:xfrm>
-            <a:off x="4754880" y="1417320"/>
-            <a:ext cx="3337560" cy="502920"/>
+          <p:cNvPr id="7" name="Severity Level 1"/>
+          <p:cNvSpPr/>
+          <p:nvPr/>
+        </p:nvSpPr>
+        <p:spPr>
+          <a:xfrm>
+            <a:off x="4526280" y="1417320"/>
+            <a:ext cx="64008" cy="1097280"/>
+          </a:xfrm>
+          <a:prstGeom prst="rect">
+            <a:avLst/>
+          </a:prstGeom>
+          <a:solidFill>
+            <a:schemeClr val="accent2"/>
+          </a:solidFill>
+          <a:ln w="12700">
+            <a:solidFill>
+              <a:schemeClr val="accent2"/>
+            </a:solidFill>
+            <a:prstDash val="solid"/>
+          </a:ln>
+        </p:spPr>
+      </p:sp>
+      <p:sp>
+        <p:nvSpPr>
+          <p:cNvPr id="8" name="Text 6"/>
+          <p:cNvSpPr txBox="1"/>
+          <p:nvPr/>
+        </p:nvSpPr>
+        <p:spPr>
+          <a:xfrm>
+            <a:off x="4754880" y="1399032"/>
+            <a:ext cx="3383280" cy="457200"/>
           </a:xfrm>
           <a:prstGeom prst="rect">
             <a:avLst/>
@@ -9650,31 +9594,100 @@
       </p:sp>
       <p:sp>
         <p:nvSpPr>
-          <p:cNvPr id="8" name="Text 6"/>
-          <p:cNvSpPr txBox="1"/>
-          <p:nvPr/>
-        </p:nvSpPr>
-        <p:spPr>
-          <a:xfrm>
-            <a:off x="4754880" y="1965960"/>
-            <a:ext cx="3337560" cy="594360"/>
-          </a:xfrm>
-          <a:prstGeom prst="rect">
-            <a:avLst/>
-          </a:prstGeom>
-          <a:noFill/>
-          <a:ln/>
-        </p:spPr>
-        <p:txBody>
-          <a:bodyPr wrap="square" lIns="0" tIns="0" rIns="0" bIns="0" rtlCol="0" anchor="t"/>
-          <a:lstStyle/>
-          <a:p>
+          <p:cNvPr id="9" name="Text 7"/>
+          <p:cNvSpPr txBox="1"/>
+          <p:nvPr/>
+        </p:nvSpPr>
+        <p:spPr>
+          <a:xfrm>
+            <a:off x="4754880" y="1874520"/>
+            <a:ext cx="3383280" cy="274320"/>
+          </a:xfrm>
+          <a:prstGeom prst="rect">
+            <a:avLst/>
+          </a:prstGeom>
+          <a:noFill/>
+          <a:ln/>
+        </p:spPr>
+        <p:txBody>
+          <a:bodyPr wrap="square" lIns="0" tIns="0" rIns="0" bIns="0" rtlCol="0" anchor="t"/>
+          <a:lstStyle/>
+          <a:p>
+            <a:pPr indent="0" marL="0">
+              <a:buNone/>
+            </a:pPr>
+            <a:r>
+              <a:rPr lang="en-US" sz="1200" b="1" dirty="0">
+                <a:solidFill>
+                  <a:schemeClr val="accent2"/>
+                </a:solidFill>
+              </a:rPr>
+              <a:t>Who: </a:t>
+            </a:r>
             <a:pPr indent="0" marL="0">
               <a:buNone/>
             </a:pPr>
             <a:r>
               <a:rPr lang="en-US" sz="1200" dirty="0">
                 <a:solidFill>
+                  <a:schemeClr val="bg1"/>
+                </a:solidFill>
+              </a:rPr>
+              <a:t>Me   </a:t>
+            </a:r>
+            <a:pPr indent="0" marL="0">
+              <a:buNone/>
+            </a:pPr>
+            <a:r>
+              <a:rPr lang="en-US" sz="1200" b="1" dirty="0">
+                <a:solidFill>
+                  <a:schemeClr val="accent2"/>
+                </a:solidFill>
+              </a:rPr>
+              <a:t>When: </a:t>
+            </a:r>
+            <a:pPr indent="0" marL="0">
+              <a:buNone/>
+            </a:pPr>
+            <a:r>
+              <a:rPr lang="en-US" sz="1200" dirty="0">
+                <a:solidFill>
+                  <a:schemeClr val="bg1"/>
+                </a:solidFill>
+              </a:rPr>
+              <a:t>Same working day</a:t>
+            </a:r>
+            <a:endParaRPr lang="en-US" sz="1200" dirty="0"/>
+          </a:p>
+        </p:txBody>
+      </p:sp>
+      <p:sp>
+        <p:nvSpPr>
+          <p:cNvPr id="10" name="Text 8"/>
+          <p:cNvSpPr txBox="1"/>
+          <p:nvPr/>
+        </p:nvSpPr>
+        <p:spPr>
+          <a:xfrm>
+            <a:off x="4754880" y="2167128"/>
+            <a:ext cx="3383280" cy="411480"/>
+          </a:xfrm>
+          <a:prstGeom prst="rect">
+            <a:avLst/>
+          </a:prstGeom>
+          <a:noFill/>
+          <a:ln/>
+        </p:spPr>
+        <p:txBody>
+          <a:bodyPr wrap="square" lIns="0" tIns="0" rIns="0" bIns="0" rtlCol="0" anchor="t"/>
+          <a:lstStyle/>
+          <a:p>
+            <a:pPr indent="0" marL="0">
+              <a:buNone/>
+            </a:pPr>
+            <a:r>
+              <a:rPr lang="en-US" sz="1200" dirty="0">
+                <a:solidFill>
                   <a:schemeClr val="accent3"/>
                 </a:solidFill>
               </a:rPr>
@@ -9686,7 +9699,7 @@
       </p:sp>
       <p:sp>
         <p:nvSpPr>
-          <p:cNvPr id="9" name="Escalation Level 2"/>
+          <p:cNvPr id="11" name="Escalation Level 2"/>
           <p:cNvSpPr/>
           <p:nvPr/>
         </p:nvSpPr>
@@ -9713,14 +9726,39 @@
       </p:sp>
       <p:sp>
         <p:nvSpPr>
-          <p:cNvPr id="10" name="Text 8"/>
-          <p:cNvSpPr txBox="1"/>
-          <p:nvPr/>
-        </p:nvSpPr>
-        <p:spPr>
-          <a:xfrm>
-            <a:off x="4754880" y="2788920"/>
-            <a:ext cx="3337560" cy="502920"/>
+          <p:cNvPr id="12" name="Severity Level 2"/>
+          <p:cNvSpPr/>
+          <p:nvPr/>
+        </p:nvSpPr>
+        <p:spPr>
+          <a:xfrm>
+            <a:off x="4526280" y="2788920"/>
+            <a:ext cx="64008" cy="1097280"/>
+          </a:xfrm>
+          <a:prstGeom prst="rect">
+            <a:avLst/>
+          </a:prstGeom>
+          <a:solidFill>
+            <a:schemeClr val="accent1"/>
+          </a:solidFill>
+          <a:ln w="12700">
+            <a:solidFill>
+              <a:schemeClr val="accent1"/>
+            </a:solidFill>
+            <a:prstDash val="solid"/>
+          </a:ln>
+        </p:spPr>
+      </p:sp>
+      <p:sp>
+        <p:nvSpPr>
+          <p:cNvPr id="13" name="Text 11"/>
+          <p:cNvSpPr txBox="1"/>
+          <p:nvPr/>
+        </p:nvSpPr>
+        <p:spPr>
+          <a:xfrm>
+            <a:off x="4754880" y="2770632"/>
+            <a:ext cx="3383280" cy="457200"/>
           </a:xfrm>
           <a:prstGeom prst="rect">
             <a:avLst/>
@@ -9760,35 +9798,104 @@
       </p:sp>
       <p:sp>
         <p:nvSpPr>
-          <p:cNvPr id="11" name="Text 9"/>
-          <p:cNvSpPr txBox="1"/>
-          <p:nvPr/>
-        </p:nvSpPr>
-        <p:spPr>
-          <a:xfrm>
-            <a:off x="4754880" y="3337560"/>
-            <a:ext cx="3337560" cy="594360"/>
-          </a:xfrm>
-          <a:prstGeom prst="rect">
-            <a:avLst/>
-          </a:prstGeom>
-          <a:noFill/>
-          <a:ln/>
-        </p:spPr>
-        <p:txBody>
-          <a:bodyPr wrap="square" lIns="0" tIns="0" rIns="0" bIns="0" rtlCol="0" anchor="t"/>
-          <a:lstStyle/>
-          <a:p>
+          <p:cNvPr id="14" name="Text 12"/>
+          <p:cNvSpPr txBox="1"/>
+          <p:nvPr/>
+        </p:nvSpPr>
+        <p:spPr>
+          <a:xfrm>
+            <a:off x="4754880" y="3246120"/>
+            <a:ext cx="3383280" cy="274320"/>
+          </a:xfrm>
+          <a:prstGeom prst="rect">
+            <a:avLst/>
+          </a:prstGeom>
+          <a:noFill/>
+          <a:ln/>
+        </p:spPr>
+        <p:txBody>
+          <a:bodyPr wrap="square" lIns="0" tIns="0" rIns="0" bIns="0" rtlCol="0" anchor="t"/>
+          <a:lstStyle/>
+          <a:p>
+            <a:pPr indent="0" marL="0">
+              <a:buNone/>
+            </a:pPr>
+            <a:r>
+              <a:rPr lang="en-US" sz="1200" b="1" dirty="0">
+                <a:solidFill>
+                  <a:schemeClr val="accent2"/>
+                </a:solidFill>
+              </a:rPr>
+              <a:t>Who: </a:t>
+            </a:r>
             <a:pPr indent="0" marL="0">
               <a:buNone/>
             </a:pPr>
             <a:r>
               <a:rPr lang="en-US" sz="1200" dirty="0">
                 <a:solidFill>
+                  <a:schemeClr val="bg1"/>
+                </a:solidFill>
+              </a:rPr>
+              <a:t>Me, then sales   </a:t>
+            </a:r>
+            <a:pPr indent="0" marL="0">
+              <a:buNone/>
+            </a:pPr>
+            <a:r>
+              <a:rPr lang="en-US" sz="1200" b="1" dirty="0">
+                <a:solidFill>
+                  <a:schemeClr val="accent2"/>
+                </a:solidFill>
+              </a:rPr>
+              <a:t>When: </a:t>
+            </a:r>
+            <a:pPr indent="0" marL="0">
+              <a:buNone/>
+            </a:pPr>
+            <a:r>
+              <a:rPr lang="en-US" sz="1200" dirty="0">
+                <a:solidFill>
+                  <a:schemeClr val="bg1"/>
+                </a:solidFill>
+              </a:rPr>
+              <a:t>Within the working day</a:t>
+            </a:r>
+            <a:endParaRPr lang="en-US" sz="1200" dirty="0"/>
+          </a:p>
+        </p:txBody>
+      </p:sp>
+      <p:sp>
+        <p:nvSpPr>
+          <p:cNvPr id="15" name="Text 13"/>
+          <p:cNvSpPr txBox="1"/>
+          <p:nvPr/>
+        </p:nvSpPr>
+        <p:spPr>
+          <a:xfrm>
+            <a:off x="4754880" y="3538728"/>
+            <a:ext cx="3383280" cy="411480"/>
+          </a:xfrm>
+          <a:prstGeom prst="rect">
+            <a:avLst/>
+          </a:prstGeom>
+          <a:noFill/>
+          <a:ln/>
+        </p:spPr>
+        <p:txBody>
+          <a:bodyPr wrap="square" lIns="0" tIns="0" rIns="0" bIns="0" rtlCol="0" anchor="t"/>
+          <a:lstStyle/>
+          <a:p>
+            <a:pPr indent="0" marL="0">
+              <a:buNone/>
+            </a:pPr>
+            <a:r>
+              <a:rPr lang="en-US" sz="1200" dirty="0">
+                <a:solidFill>
                   <a:schemeClr val="accent3"/>
                 </a:solidFill>
               </a:rPr>
-              <a:t>Move to WhatsApp or a call, pass to sales with context within the working day</a:t>
+              <a:t>Move to WhatsApp or a call and pass to sales with context</a:t>
             </a:r>
             <a:endParaRPr lang="en-US" sz="1200" dirty="0"/>
           </a:p>
@@ -9796,7 +9903,7 @@
       </p:sp>
       <p:sp>
         <p:nvSpPr>
-          <p:cNvPr id="12" name="Escalation Level 3"/>
+          <p:cNvPr id="16" name="Escalation Level 3"/>
           <p:cNvSpPr/>
           <p:nvPr/>
         </p:nvSpPr>
@@ -9823,14 +9930,39 @@
       </p:sp>
       <p:sp>
         <p:nvSpPr>
-          <p:cNvPr id="13" name="Text 11"/>
-          <p:cNvSpPr txBox="1"/>
-          <p:nvPr/>
-        </p:nvSpPr>
-        <p:spPr>
-          <a:xfrm>
-            <a:off x="4754880" y="4160520"/>
-            <a:ext cx="3337560" cy="502920"/>
+          <p:cNvPr id="17" name="Severity Level 3"/>
+          <p:cNvSpPr/>
+          <p:nvPr/>
+        </p:nvSpPr>
+        <p:spPr>
+          <a:xfrm>
+            <a:off x="4526280" y="4160520"/>
+            <a:ext cx="64008" cy="1097280"/>
+          </a:xfrm>
+          <a:prstGeom prst="rect">
+            <a:avLst/>
+          </a:prstGeom>
+          <a:solidFill>
+            <a:schemeClr val="accent4"/>
+          </a:solidFill>
+          <a:ln w="12700">
+            <a:solidFill>
+              <a:schemeClr val="accent4"/>
+            </a:solidFill>
+            <a:prstDash val="solid"/>
+          </a:ln>
+        </p:spPr>
+      </p:sp>
+      <p:sp>
+        <p:nvSpPr>
+          <p:cNvPr id="18" name="Text 16"/>
+          <p:cNvSpPr txBox="1"/>
+          <p:nvPr/>
+        </p:nvSpPr>
+        <p:spPr>
+          <a:xfrm>
+            <a:off x="4754880" y="4142232"/>
+            <a:ext cx="3383280" cy="457200"/>
           </a:xfrm>
           <a:prstGeom prst="rect">
             <a:avLst/>
@@ -9870,35 +10002,104 @@
       </p:sp>
       <p:sp>
         <p:nvSpPr>
-          <p:cNvPr id="14" name="Text 12"/>
-          <p:cNvSpPr txBox="1"/>
-          <p:nvPr/>
-        </p:nvSpPr>
-        <p:spPr>
-          <a:xfrm>
-            <a:off x="4754880" y="4709160"/>
-            <a:ext cx="3337560" cy="594360"/>
-          </a:xfrm>
-          <a:prstGeom prst="rect">
-            <a:avLst/>
-          </a:prstGeom>
-          <a:noFill/>
-          <a:ln/>
-        </p:spPr>
-        <p:txBody>
-          <a:bodyPr wrap="square" lIns="0" tIns="0" rIns="0" bIns="0" rtlCol="0" anchor="t"/>
-          <a:lstStyle/>
-          <a:p>
+          <p:cNvPr id="19" name="Text 17"/>
+          <p:cNvSpPr txBox="1"/>
+          <p:nvPr/>
+        </p:nvSpPr>
+        <p:spPr>
+          <a:xfrm>
+            <a:off x="4754880" y="4617720"/>
+            <a:ext cx="3383280" cy="274320"/>
+          </a:xfrm>
+          <a:prstGeom prst="rect">
+            <a:avLst/>
+          </a:prstGeom>
+          <a:noFill/>
+          <a:ln/>
+        </p:spPr>
+        <p:txBody>
+          <a:bodyPr wrap="square" lIns="0" tIns="0" rIns="0" bIns="0" rtlCol="0" anchor="t"/>
+          <a:lstStyle/>
+          <a:p>
+            <a:pPr indent="0" marL="0">
+              <a:buNone/>
+            </a:pPr>
+            <a:r>
+              <a:rPr lang="en-US" sz="1200" b="1" dirty="0">
+                <a:solidFill>
+                  <a:schemeClr val="accent2"/>
+                </a:solidFill>
+              </a:rPr>
+              <a:t>Who: </a:t>
+            </a:r>
             <a:pPr indent="0" marL="0">
               <a:buNone/>
             </a:pPr>
             <a:r>
               <a:rPr lang="en-US" sz="1200" dirty="0">
                 <a:solidFill>
+                  <a:schemeClr val="bg1"/>
+                </a:solidFill>
+              </a:rPr>
+              <a:t>Leadership and me   </a:t>
+            </a:r>
+            <a:pPr indent="0" marL="0">
+              <a:buNone/>
+            </a:pPr>
+            <a:r>
+              <a:rPr lang="en-US" sz="1200" b="1" dirty="0">
+                <a:solidFill>
+                  <a:schemeClr val="accent2"/>
+                </a:solidFill>
+              </a:rPr>
+              <a:t>When: </a:t>
+            </a:r>
+            <a:pPr indent="0" marL="0">
+              <a:buNone/>
+            </a:pPr>
+            <a:r>
+              <a:rPr lang="en-US" sz="1200" dirty="0">
+                <a:solidFill>
+                  <a:schemeClr val="bg1"/>
+                </a:solidFill>
+              </a:rPr>
+              <a:t>Immediately</a:t>
+            </a:r>
+            <a:endParaRPr lang="en-US" sz="1200" dirty="0"/>
+          </a:p>
+        </p:txBody>
+      </p:sp>
+      <p:sp>
+        <p:nvSpPr>
+          <p:cNvPr id="20" name="Text 18"/>
+          <p:cNvSpPr txBox="1"/>
+          <p:nvPr/>
+        </p:nvSpPr>
+        <p:spPr>
+          <a:xfrm>
+            <a:off x="4754880" y="4910328"/>
+            <a:ext cx="3383280" cy="411480"/>
+          </a:xfrm>
+          <a:prstGeom prst="rect">
+            <a:avLst/>
+          </a:prstGeom>
+          <a:noFill/>
+          <a:ln/>
+        </p:spPr>
+        <p:txBody>
+          <a:bodyPr wrap="square" lIns="0" tIns="0" rIns="0" bIns="0" rtlCol="0" anchor="t"/>
+          <a:lstStyle/>
+          <a:p>
+            <a:pPr indent="0" marL="0">
+              <a:buNone/>
+            </a:pPr>
+            <a:r>
+              <a:rPr lang="en-US" sz="1200" dirty="0">
+                <a:solidFill>
                   <a:schemeClr val="accent3"/>
                 </a:solidFill>
               </a:rPr>
-              <a:t>Escalate to leadership at once, reply once politely, take it offline</a:t>
+              <a:t>Reply once, politely, take it offline and log it</a:t>
             </a:r>
             <a:endParaRPr lang="en-US" sz="1200" dirty="0"/>
           </a:p>
@@ -9906,7 +10107,7 @@
       </p:sp>
       <p:sp>
         <p:nvSpPr>
-          <p:cNvPr id="15" name="Listening card"/>
+          <p:cNvPr id="21" name="Listening card"/>
           <p:cNvSpPr/>
           <p:nvPr/>
         </p:nvSpPr>
@@ -9933,7 +10134,7 @@
       </p:sp>
       <p:sp>
         <p:nvSpPr>
-          <p:cNvPr id="16" name="Text 14"/>
+          <p:cNvPr id="22" name="Text 20"/>
           <p:cNvSpPr txBox="1"/>
           <p:nvPr/>
         </p:nvSpPr>
@@ -9969,7 +10170,7 @@
       </p:sp>
       <p:sp>
         <p:nvSpPr>
-          <p:cNvPr id="17" name="Text 15"/>
+          <p:cNvPr id="23" name="Text 21"/>
           <p:cNvSpPr txBox="1"/>
           <p:nvPr/>
         </p:nvSpPr>
@@ -10099,7 +10300,7 @@
       </p:sp>
       <p:sp>
         <p:nvSpPr>
-          <p:cNvPr id="18" name="Reputation card"/>
+          <p:cNvPr id="24" name="Reputation card"/>
           <p:cNvSpPr/>
           <p:nvPr/>
         </p:nvSpPr>
@@ -10126,7 +10327,7 @@
       </p:sp>
       <p:sp>
         <p:nvSpPr>
-          <p:cNvPr id="19" name="Text 17"/>
+          <p:cNvPr id="25" name="Text 23"/>
           <p:cNvSpPr txBox="1"/>
           <p:nvPr/>
         </p:nvSpPr>
@@ -10162,7 +10363,7 @@
       </p:sp>
       <p:sp>
         <p:nvSpPr>
-          <p:cNvPr id="20" name="Text 18"/>
+          <p:cNvPr id="26" name="Text 24"/>
           <p:cNvSpPr txBox="1"/>
           <p:nvPr/>
         </p:nvSpPr>
@@ -10238,7 +10439,7 @@
       </p:sp>
       <p:sp>
         <p:nvSpPr>
-          <p:cNvPr id="21" name="ORM strip"/>
+          <p:cNvPr id="27" name="ORM strip"/>
           <p:cNvSpPr/>
           <p:nvPr/>
         </p:nvSpPr>
@@ -10265,7 +10466,7 @@
       </p:sp>
       <p:sp>
         <p:nvSpPr>
-          <p:cNvPr id="22" name="Text 20"/>
+          <p:cNvPr id="28" name="Text 26"/>
           <p:cNvSpPr txBox="1"/>
           <p:nvPr/>
         </p:nvSpPr>
